--- a/Docs/MODELO_DATOS_INVENTARIO.pptx
+++ b/Docs/MODELO_DATOS_INVENTARIO.pptx
@@ -107,7 +107,7 @@
   </p:defaultTextStyle>
   <p:extLst>
     <p:ext uri="{EFAFB233-063F-42B5-8137-9DF3F51BA10A}">
-      <p15:sldGuideLst xmlns="" xmlns:p15="http://schemas.microsoft.com/office/powerpoint/2012/main"/>
+      <p15:sldGuideLst xmlns:p15="http://schemas.microsoft.com/office/powerpoint/2012/main" xmlns=""/>
     </p:ext>
   </p:extLst>
 </p:presentation>
@@ -244,7 +244,7 @@
           <a:p>
             <a:fld id="{2DDBA0FF-ACFD-42C9-A4A3-E9ECDB2288AD}" type="datetimeFigureOut">
               <a:rPr lang="en-US" smtClean="0"/>
-              <a:t>9/9/2020</a:t>
+              <a:t>9/16/2020</a:t>
             </a:fld>
             <a:endParaRPr lang="en-US"/>
           </a:p>
@@ -414,7 +414,7 @@
           <a:p>
             <a:fld id="{2DDBA0FF-ACFD-42C9-A4A3-E9ECDB2288AD}" type="datetimeFigureOut">
               <a:rPr lang="en-US" smtClean="0"/>
-              <a:t>9/9/2020</a:t>
+              <a:t>9/16/2020</a:t>
             </a:fld>
             <a:endParaRPr lang="en-US"/>
           </a:p>
@@ -594,7 +594,7 @@
           <a:p>
             <a:fld id="{2DDBA0FF-ACFD-42C9-A4A3-E9ECDB2288AD}" type="datetimeFigureOut">
               <a:rPr lang="en-US" smtClean="0"/>
-              <a:t>9/9/2020</a:t>
+              <a:t>9/16/2020</a:t>
             </a:fld>
             <a:endParaRPr lang="en-US"/>
           </a:p>
@@ -764,7 +764,7 @@
           <a:p>
             <a:fld id="{2DDBA0FF-ACFD-42C9-A4A3-E9ECDB2288AD}" type="datetimeFigureOut">
               <a:rPr lang="en-US" smtClean="0"/>
-              <a:t>9/9/2020</a:t>
+              <a:t>9/16/2020</a:t>
             </a:fld>
             <a:endParaRPr lang="en-US"/>
           </a:p>
@@ -1010,7 +1010,7 @@
           <a:p>
             <a:fld id="{2DDBA0FF-ACFD-42C9-A4A3-E9ECDB2288AD}" type="datetimeFigureOut">
               <a:rPr lang="en-US" smtClean="0"/>
-              <a:t>9/9/2020</a:t>
+              <a:t>9/16/2020</a:t>
             </a:fld>
             <a:endParaRPr lang="en-US"/>
           </a:p>
@@ -1242,7 +1242,7 @@
           <a:p>
             <a:fld id="{2DDBA0FF-ACFD-42C9-A4A3-E9ECDB2288AD}" type="datetimeFigureOut">
               <a:rPr lang="en-US" smtClean="0"/>
-              <a:t>9/9/2020</a:t>
+              <a:t>9/16/2020</a:t>
             </a:fld>
             <a:endParaRPr lang="en-US"/>
           </a:p>
@@ -1609,7 +1609,7 @@
           <a:p>
             <a:fld id="{2DDBA0FF-ACFD-42C9-A4A3-E9ECDB2288AD}" type="datetimeFigureOut">
               <a:rPr lang="en-US" smtClean="0"/>
-              <a:t>9/9/2020</a:t>
+              <a:t>9/16/2020</a:t>
             </a:fld>
             <a:endParaRPr lang="en-US"/>
           </a:p>
@@ -1727,7 +1727,7 @@
           <a:p>
             <a:fld id="{2DDBA0FF-ACFD-42C9-A4A3-E9ECDB2288AD}" type="datetimeFigureOut">
               <a:rPr lang="en-US" smtClean="0"/>
-              <a:t>9/9/2020</a:t>
+              <a:t>9/16/2020</a:t>
             </a:fld>
             <a:endParaRPr lang="en-US"/>
           </a:p>
@@ -1822,7 +1822,7 @@
           <a:p>
             <a:fld id="{2DDBA0FF-ACFD-42C9-A4A3-E9ECDB2288AD}" type="datetimeFigureOut">
               <a:rPr lang="en-US" smtClean="0"/>
-              <a:t>9/9/2020</a:t>
+              <a:t>9/16/2020</a:t>
             </a:fld>
             <a:endParaRPr lang="en-US"/>
           </a:p>
@@ -2099,7 +2099,7 @@
           <a:p>
             <a:fld id="{2DDBA0FF-ACFD-42C9-A4A3-E9ECDB2288AD}" type="datetimeFigureOut">
               <a:rPr lang="en-US" smtClean="0"/>
-              <a:t>9/9/2020</a:t>
+              <a:t>9/16/2020</a:t>
             </a:fld>
             <a:endParaRPr lang="en-US"/>
           </a:p>
@@ -2352,7 +2352,7 @@
           <a:p>
             <a:fld id="{2DDBA0FF-ACFD-42C9-A4A3-E9ECDB2288AD}" type="datetimeFigureOut">
               <a:rPr lang="en-US" smtClean="0"/>
-              <a:t>9/9/2020</a:t>
+              <a:t>9/16/2020</a:t>
             </a:fld>
             <a:endParaRPr lang="en-US"/>
           </a:p>
@@ -2565,7 +2565,7 @@
           <a:p>
             <a:fld id="{2DDBA0FF-ACFD-42C9-A4A3-E9ECDB2288AD}" type="datetimeFigureOut">
               <a:rPr lang="en-US" smtClean="0"/>
-              <a:t>9/9/2020</a:t>
+              <a:t>9/16/2020</a:t>
             </a:fld>
             <a:endParaRPr lang="en-US"/>
           </a:p>
@@ -3753,13 +3753,18 @@
           </a:p>
           <a:p>
             <a:r>
-              <a:rPr lang="es-MX" sz="1050" b="1" dirty="0" smtClean="0">
+              <a:rPr lang="es-MX" sz="1050" b="1" smtClean="0">
                 <a:solidFill>
                   <a:srgbClr val="00B050"/>
                 </a:solidFill>
               </a:rPr>
-              <a:t>ESTATUS</a:t>
-            </a:r>
+              <a:t>K_ESTATUS</a:t>
+            </a:r>
+            <a:endParaRPr lang="es-MX" sz="1050" b="1" dirty="0" smtClean="0">
+              <a:solidFill>
+                <a:srgbClr val="00B050"/>
+              </a:solidFill>
+            </a:endParaRPr>
           </a:p>
           <a:p>
             <a:r>
@@ -4367,7 +4372,7 @@
   <a:extraClrSchemeLst/>
   <a:extLst>
     <a:ext uri="{05A4C25C-085E-4340-85A3-A5531E510DB2}">
-      <thm15:themeFamily xmlns="" xmlns:thm15="http://schemas.microsoft.com/office/thememl/2012/main" name="Office Theme" id="{62F939B6-93AF-4DB8-9C6B-D6C7DFDC589F}" vid="{4A3C46E8-61CC-4603-A589-7422A47A8E4A}"/>
+      <thm15:themeFamily xmlns:thm15="http://schemas.microsoft.com/office/thememl/2012/main" xmlns="" name="Office Theme" id="{62F939B6-93AF-4DB8-9C6B-D6C7DFDC589F}" vid="{4A3C46E8-61CC-4603-A589-7422A47A8E4A}"/>
     </a:ext>
   </a:extLst>
 </a:theme>

--- a/Docs/MODELO_DATOS_INVENTARIO.pptx
+++ b/Docs/MODELO_DATOS_INVENTARIO.pptx
@@ -107,7 +107,18 @@
   </p:defaultTextStyle>
   <p:extLst>
     <p:ext uri="{EFAFB233-063F-42B5-8137-9DF3F51BA10A}">
-      <p15:sldGuideLst xmlns:p15="http://schemas.microsoft.com/office/powerpoint/2012/main" xmlns=""/>
+      <p15:sldGuideLst xmlns:p15="http://schemas.microsoft.com/office/powerpoint/2012/main">
+        <p15:guide id="1" orient="horz" pos="2160">
+          <p15:clr>
+            <a:srgbClr val="A4A3A4"/>
+          </p15:clr>
+        </p15:guide>
+        <p15:guide id="2" pos="3840">
+          <p15:clr>
+            <a:srgbClr val="A4A3A4"/>
+          </p15:clr>
+        </p15:guide>
+      </p15:sldGuideLst>
     </p:ext>
   </p:extLst>
 </p:presentation>
@@ -155,10 +166,9 @@
           </a:lstStyle>
           <a:p>
             <a:r>
-              <a:rPr lang="en-US" smtClean="0"/>
+              <a:rPr lang="en-US"/>
               <a:t>Click to edit Master title style</a:t>
             </a:r>
-            <a:endParaRPr lang="en-US"/>
           </a:p>
         </p:txBody>
       </p:sp>
@@ -220,10 +230,9 @@
           </a:lstStyle>
           <a:p>
             <a:r>
-              <a:rPr lang="en-US" smtClean="0"/>
+              <a:rPr lang="en-US"/>
               <a:t>Click to edit Master subtitle style</a:t>
             </a:r>
-            <a:endParaRPr lang="en-US"/>
           </a:p>
         </p:txBody>
       </p:sp>
@@ -244,7 +253,7 @@
           <a:p>
             <a:fld id="{2DDBA0FF-ACFD-42C9-A4A3-E9ECDB2288AD}" type="datetimeFigureOut">
               <a:rPr lang="en-US" smtClean="0"/>
-              <a:t>9/16/2020</a:t>
+              <a:t>9/24/2020</a:t>
             </a:fld>
             <a:endParaRPr lang="en-US"/>
           </a:p>
@@ -286,7 +295,7 @@
           <a:p>
             <a:fld id="{547F1A0F-EF39-42ED-8DDC-A98A7EE806D8}" type="slidenum">
               <a:rPr lang="en-US" smtClean="0"/>
-              <a:t>‹#›</a:t>
+              <a:t>‹Nº›</a:t>
             </a:fld>
             <a:endParaRPr lang="en-US"/>
           </a:p>
@@ -338,10 +347,9 @@
           <a:lstStyle/>
           <a:p>
             <a:r>
-              <a:rPr lang="en-US" smtClean="0"/>
+              <a:rPr lang="en-US"/>
               <a:t>Click to edit Master title style</a:t>
             </a:r>
-            <a:endParaRPr lang="en-US"/>
           </a:p>
         </p:txBody>
       </p:sp>
@@ -362,38 +370,37 @@
           <a:p>
             <a:pPr lvl="0"/>
             <a:r>
-              <a:rPr lang="en-US" smtClean="0"/>
+              <a:rPr lang="en-US"/>
               <a:t>Edit Master text styles</a:t>
             </a:r>
           </a:p>
           <a:p>
             <a:pPr lvl="1"/>
             <a:r>
-              <a:rPr lang="en-US" smtClean="0"/>
+              <a:rPr lang="en-US"/>
               <a:t>Second level</a:t>
             </a:r>
           </a:p>
           <a:p>
             <a:pPr lvl="2"/>
             <a:r>
-              <a:rPr lang="en-US" smtClean="0"/>
+              <a:rPr lang="en-US"/>
               <a:t>Third level</a:t>
             </a:r>
           </a:p>
           <a:p>
             <a:pPr lvl="3"/>
             <a:r>
-              <a:rPr lang="en-US" smtClean="0"/>
+              <a:rPr lang="en-US"/>
               <a:t>Fourth level</a:t>
             </a:r>
           </a:p>
           <a:p>
             <a:pPr lvl="4"/>
             <a:r>
-              <a:rPr lang="en-US" smtClean="0"/>
+              <a:rPr lang="en-US"/>
               <a:t>Fifth level</a:t>
             </a:r>
-            <a:endParaRPr lang="en-US"/>
           </a:p>
         </p:txBody>
       </p:sp>
@@ -414,7 +421,7 @@
           <a:p>
             <a:fld id="{2DDBA0FF-ACFD-42C9-A4A3-E9ECDB2288AD}" type="datetimeFigureOut">
               <a:rPr lang="en-US" smtClean="0"/>
-              <a:t>9/16/2020</a:t>
+              <a:t>9/24/2020</a:t>
             </a:fld>
             <a:endParaRPr lang="en-US"/>
           </a:p>
@@ -456,7 +463,7 @@
           <a:p>
             <a:fld id="{547F1A0F-EF39-42ED-8DDC-A98A7EE806D8}" type="slidenum">
               <a:rPr lang="en-US" smtClean="0"/>
-              <a:t>‹#›</a:t>
+              <a:t>‹Nº›</a:t>
             </a:fld>
             <a:endParaRPr lang="en-US"/>
           </a:p>
@@ -513,10 +520,9 @@
           <a:lstStyle/>
           <a:p>
             <a:r>
-              <a:rPr lang="en-US" smtClean="0"/>
+              <a:rPr lang="en-US"/>
               <a:t>Click to edit Master title style</a:t>
             </a:r>
-            <a:endParaRPr lang="en-US"/>
           </a:p>
         </p:txBody>
       </p:sp>
@@ -542,38 +548,37 @@
           <a:p>
             <a:pPr lvl="0"/>
             <a:r>
-              <a:rPr lang="en-US" smtClean="0"/>
+              <a:rPr lang="en-US"/>
               <a:t>Edit Master text styles</a:t>
             </a:r>
           </a:p>
           <a:p>
             <a:pPr lvl="1"/>
             <a:r>
-              <a:rPr lang="en-US" smtClean="0"/>
+              <a:rPr lang="en-US"/>
               <a:t>Second level</a:t>
             </a:r>
           </a:p>
           <a:p>
             <a:pPr lvl="2"/>
             <a:r>
-              <a:rPr lang="en-US" smtClean="0"/>
+              <a:rPr lang="en-US"/>
               <a:t>Third level</a:t>
             </a:r>
           </a:p>
           <a:p>
             <a:pPr lvl="3"/>
             <a:r>
-              <a:rPr lang="en-US" smtClean="0"/>
+              <a:rPr lang="en-US"/>
               <a:t>Fourth level</a:t>
             </a:r>
           </a:p>
           <a:p>
             <a:pPr lvl="4"/>
             <a:r>
-              <a:rPr lang="en-US" smtClean="0"/>
+              <a:rPr lang="en-US"/>
               <a:t>Fifth level</a:t>
             </a:r>
-            <a:endParaRPr lang="en-US"/>
           </a:p>
         </p:txBody>
       </p:sp>
@@ -594,7 +599,7 @@
           <a:p>
             <a:fld id="{2DDBA0FF-ACFD-42C9-A4A3-E9ECDB2288AD}" type="datetimeFigureOut">
               <a:rPr lang="en-US" smtClean="0"/>
-              <a:t>9/16/2020</a:t>
+              <a:t>9/24/2020</a:t>
             </a:fld>
             <a:endParaRPr lang="en-US"/>
           </a:p>
@@ -636,7 +641,7 @@
           <a:p>
             <a:fld id="{547F1A0F-EF39-42ED-8DDC-A98A7EE806D8}" type="slidenum">
               <a:rPr lang="en-US" smtClean="0"/>
-              <a:t>‹#›</a:t>
+              <a:t>‹Nº›</a:t>
             </a:fld>
             <a:endParaRPr lang="en-US"/>
           </a:p>
@@ -688,10 +693,9 @@
           <a:lstStyle/>
           <a:p>
             <a:r>
-              <a:rPr lang="en-US" smtClean="0"/>
+              <a:rPr lang="en-US"/>
               <a:t>Click to edit Master title style</a:t>
             </a:r>
-            <a:endParaRPr lang="en-US"/>
           </a:p>
         </p:txBody>
       </p:sp>
@@ -712,38 +716,37 @@
           <a:p>
             <a:pPr lvl="0"/>
             <a:r>
-              <a:rPr lang="en-US" smtClean="0"/>
+              <a:rPr lang="en-US"/>
               <a:t>Edit Master text styles</a:t>
             </a:r>
           </a:p>
           <a:p>
             <a:pPr lvl="1"/>
             <a:r>
-              <a:rPr lang="en-US" smtClean="0"/>
+              <a:rPr lang="en-US"/>
               <a:t>Second level</a:t>
             </a:r>
           </a:p>
           <a:p>
             <a:pPr lvl="2"/>
             <a:r>
-              <a:rPr lang="en-US" smtClean="0"/>
+              <a:rPr lang="en-US"/>
               <a:t>Third level</a:t>
             </a:r>
           </a:p>
           <a:p>
             <a:pPr lvl="3"/>
             <a:r>
-              <a:rPr lang="en-US" smtClean="0"/>
+              <a:rPr lang="en-US"/>
               <a:t>Fourth level</a:t>
             </a:r>
           </a:p>
           <a:p>
             <a:pPr lvl="4"/>
             <a:r>
-              <a:rPr lang="en-US" smtClean="0"/>
+              <a:rPr lang="en-US"/>
               <a:t>Fifth level</a:t>
             </a:r>
-            <a:endParaRPr lang="en-US"/>
           </a:p>
         </p:txBody>
       </p:sp>
@@ -764,7 +767,7 @@
           <a:p>
             <a:fld id="{2DDBA0FF-ACFD-42C9-A4A3-E9ECDB2288AD}" type="datetimeFigureOut">
               <a:rPr lang="en-US" smtClean="0"/>
-              <a:t>9/16/2020</a:t>
+              <a:t>9/24/2020</a:t>
             </a:fld>
             <a:endParaRPr lang="en-US"/>
           </a:p>
@@ -806,7 +809,7 @@
           <a:p>
             <a:fld id="{547F1A0F-EF39-42ED-8DDC-A98A7EE806D8}" type="slidenum">
               <a:rPr lang="en-US" smtClean="0"/>
-              <a:t>‹#›</a:t>
+              <a:t>‹Nº›</a:t>
             </a:fld>
             <a:endParaRPr lang="en-US"/>
           </a:p>
@@ -867,10 +870,9 @@
           </a:lstStyle>
           <a:p>
             <a:r>
-              <a:rPr lang="en-US" smtClean="0"/>
+              <a:rPr lang="en-US"/>
               <a:t>Click to edit Master title style</a:t>
             </a:r>
-            <a:endParaRPr lang="en-US"/>
           </a:p>
         </p:txBody>
       </p:sp>
@@ -987,7 +989,7 @@
           <a:p>
             <a:pPr lvl="0"/>
             <a:r>
-              <a:rPr lang="en-US" smtClean="0"/>
+              <a:rPr lang="en-US"/>
               <a:t>Edit Master text styles</a:t>
             </a:r>
           </a:p>
@@ -1010,7 +1012,7 @@
           <a:p>
             <a:fld id="{2DDBA0FF-ACFD-42C9-A4A3-E9ECDB2288AD}" type="datetimeFigureOut">
               <a:rPr lang="en-US" smtClean="0"/>
-              <a:t>9/16/2020</a:t>
+              <a:t>9/24/2020</a:t>
             </a:fld>
             <a:endParaRPr lang="en-US"/>
           </a:p>
@@ -1052,7 +1054,7 @@
           <a:p>
             <a:fld id="{547F1A0F-EF39-42ED-8DDC-A98A7EE806D8}" type="slidenum">
               <a:rPr lang="en-US" smtClean="0"/>
-              <a:t>‹#›</a:t>
+              <a:t>‹Nº›</a:t>
             </a:fld>
             <a:endParaRPr lang="en-US"/>
           </a:p>
@@ -1104,10 +1106,9 @@
           <a:lstStyle/>
           <a:p>
             <a:r>
-              <a:rPr lang="en-US" smtClean="0"/>
+              <a:rPr lang="en-US"/>
               <a:t>Click to edit Master title style</a:t>
             </a:r>
-            <a:endParaRPr lang="en-US"/>
           </a:p>
         </p:txBody>
       </p:sp>
@@ -1133,38 +1134,37 @@
           <a:p>
             <a:pPr lvl="0"/>
             <a:r>
-              <a:rPr lang="en-US" smtClean="0"/>
+              <a:rPr lang="en-US"/>
               <a:t>Edit Master text styles</a:t>
             </a:r>
           </a:p>
           <a:p>
             <a:pPr lvl="1"/>
             <a:r>
-              <a:rPr lang="en-US" smtClean="0"/>
+              <a:rPr lang="en-US"/>
               <a:t>Second level</a:t>
             </a:r>
           </a:p>
           <a:p>
             <a:pPr lvl="2"/>
             <a:r>
-              <a:rPr lang="en-US" smtClean="0"/>
+              <a:rPr lang="en-US"/>
               <a:t>Third level</a:t>
             </a:r>
           </a:p>
           <a:p>
             <a:pPr lvl="3"/>
             <a:r>
-              <a:rPr lang="en-US" smtClean="0"/>
+              <a:rPr lang="en-US"/>
               <a:t>Fourth level</a:t>
             </a:r>
           </a:p>
           <a:p>
             <a:pPr lvl="4"/>
             <a:r>
-              <a:rPr lang="en-US" smtClean="0"/>
+              <a:rPr lang="en-US"/>
               <a:t>Fifth level</a:t>
             </a:r>
-            <a:endParaRPr lang="en-US"/>
           </a:p>
         </p:txBody>
       </p:sp>
@@ -1190,38 +1190,37 @@
           <a:p>
             <a:pPr lvl="0"/>
             <a:r>
-              <a:rPr lang="en-US" smtClean="0"/>
+              <a:rPr lang="en-US"/>
               <a:t>Edit Master text styles</a:t>
             </a:r>
           </a:p>
           <a:p>
             <a:pPr lvl="1"/>
             <a:r>
-              <a:rPr lang="en-US" smtClean="0"/>
+              <a:rPr lang="en-US"/>
               <a:t>Second level</a:t>
             </a:r>
           </a:p>
           <a:p>
             <a:pPr lvl="2"/>
             <a:r>
-              <a:rPr lang="en-US" smtClean="0"/>
+              <a:rPr lang="en-US"/>
               <a:t>Third level</a:t>
             </a:r>
           </a:p>
           <a:p>
             <a:pPr lvl="3"/>
             <a:r>
-              <a:rPr lang="en-US" smtClean="0"/>
+              <a:rPr lang="en-US"/>
               <a:t>Fourth level</a:t>
             </a:r>
           </a:p>
           <a:p>
             <a:pPr lvl="4"/>
             <a:r>
-              <a:rPr lang="en-US" smtClean="0"/>
+              <a:rPr lang="en-US"/>
               <a:t>Fifth level</a:t>
             </a:r>
-            <a:endParaRPr lang="en-US"/>
           </a:p>
         </p:txBody>
       </p:sp>
@@ -1242,7 +1241,7 @@
           <a:p>
             <a:fld id="{2DDBA0FF-ACFD-42C9-A4A3-E9ECDB2288AD}" type="datetimeFigureOut">
               <a:rPr lang="en-US" smtClean="0"/>
-              <a:t>9/16/2020</a:t>
+              <a:t>9/24/2020</a:t>
             </a:fld>
             <a:endParaRPr lang="en-US"/>
           </a:p>
@@ -1284,7 +1283,7 @@
           <a:p>
             <a:fld id="{547F1A0F-EF39-42ED-8DDC-A98A7EE806D8}" type="slidenum">
               <a:rPr lang="en-US" smtClean="0"/>
-              <a:t>‹#›</a:t>
+              <a:t>‹Nº›</a:t>
             </a:fld>
             <a:endParaRPr lang="en-US"/>
           </a:p>
@@ -1341,10 +1340,9 @@
           <a:lstStyle/>
           <a:p>
             <a:r>
-              <a:rPr lang="en-US" smtClean="0"/>
+              <a:rPr lang="en-US"/>
               <a:t>Click to edit Master title style</a:t>
             </a:r>
-            <a:endParaRPr lang="en-US"/>
           </a:p>
         </p:txBody>
       </p:sp>
@@ -1407,7 +1405,7 @@
           <a:p>
             <a:pPr lvl="0"/>
             <a:r>
-              <a:rPr lang="en-US" smtClean="0"/>
+              <a:rPr lang="en-US"/>
               <a:t>Edit Master text styles</a:t>
             </a:r>
           </a:p>
@@ -1435,38 +1433,37 @@
           <a:p>
             <a:pPr lvl="0"/>
             <a:r>
-              <a:rPr lang="en-US" smtClean="0"/>
+              <a:rPr lang="en-US"/>
               <a:t>Edit Master text styles</a:t>
             </a:r>
           </a:p>
           <a:p>
             <a:pPr lvl="1"/>
             <a:r>
-              <a:rPr lang="en-US" smtClean="0"/>
+              <a:rPr lang="en-US"/>
               <a:t>Second level</a:t>
             </a:r>
           </a:p>
           <a:p>
             <a:pPr lvl="2"/>
             <a:r>
-              <a:rPr lang="en-US" smtClean="0"/>
+              <a:rPr lang="en-US"/>
               <a:t>Third level</a:t>
             </a:r>
           </a:p>
           <a:p>
             <a:pPr lvl="3"/>
             <a:r>
-              <a:rPr lang="en-US" smtClean="0"/>
+              <a:rPr lang="en-US"/>
               <a:t>Fourth level</a:t>
             </a:r>
           </a:p>
           <a:p>
             <a:pPr lvl="4"/>
             <a:r>
-              <a:rPr lang="en-US" smtClean="0"/>
+              <a:rPr lang="en-US"/>
               <a:t>Fifth level</a:t>
             </a:r>
-            <a:endParaRPr lang="en-US"/>
           </a:p>
         </p:txBody>
       </p:sp>
@@ -1529,7 +1526,7 @@
           <a:p>
             <a:pPr lvl="0"/>
             <a:r>
-              <a:rPr lang="en-US" smtClean="0"/>
+              <a:rPr lang="en-US"/>
               <a:t>Edit Master text styles</a:t>
             </a:r>
           </a:p>
@@ -1557,38 +1554,37 @@
           <a:p>
             <a:pPr lvl="0"/>
             <a:r>
-              <a:rPr lang="en-US" smtClean="0"/>
+              <a:rPr lang="en-US"/>
               <a:t>Edit Master text styles</a:t>
             </a:r>
           </a:p>
           <a:p>
             <a:pPr lvl="1"/>
             <a:r>
-              <a:rPr lang="en-US" smtClean="0"/>
+              <a:rPr lang="en-US"/>
               <a:t>Second level</a:t>
             </a:r>
           </a:p>
           <a:p>
             <a:pPr lvl="2"/>
             <a:r>
-              <a:rPr lang="en-US" smtClean="0"/>
+              <a:rPr lang="en-US"/>
               <a:t>Third level</a:t>
             </a:r>
           </a:p>
           <a:p>
             <a:pPr lvl="3"/>
             <a:r>
-              <a:rPr lang="en-US" smtClean="0"/>
+              <a:rPr lang="en-US"/>
               <a:t>Fourth level</a:t>
             </a:r>
           </a:p>
           <a:p>
             <a:pPr lvl="4"/>
             <a:r>
-              <a:rPr lang="en-US" smtClean="0"/>
+              <a:rPr lang="en-US"/>
               <a:t>Fifth level</a:t>
             </a:r>
-            <a:endParaRPr lang="en-US"/>
           </a:p>
         </p:txBody>
       </p:sp>
@@ -1609,7 +1605,7 @@
           <a:p>
             <a:fld id="{2DDBA0FF-ACFD-42C9-A4A3-E9ECDB2288AD}" type="datetimeFigureOut">
               <a:rPr lang="en-US" smtClean="0"/>
-              <a:t>9/16/2020</a:t>
+              <a:t>9/24/2020</a:t>
             </a:fld>
             <a:endParaRPr lang="en-US"/>
           </a:p>
@@ -1651,7 +1647,7 @@
           <a:p>
             <a:fld id="{547F1A0F-EF39-42ED-8DDC-A98A7EE806D8}" type="slidenum">
               <a:rPr lang="en-US" smtClean="0"/>
-              <a:t>‹#›</a:t>
+              <a:t>‹Nº›</a:t>
             </a:fld>
             <a:endParaRPr lang="en-US"/>
           </a:p>
@@ -1703,10 +1699,9 @@
           <a:lstStyle/>
           <a:p>
             <a:r>
-              <a:rPr lang="en-US" smtClean="0"/>
+              <a:rPr lang="en-US"/>
               <a:t>Click to edit Master title style</a:t>
             </a:r>
-            <a:endParaRPr lang="en-US"/>
           </a:p>
         </p:txBody>
       </p:sp>
@@ -1727,7 +1722,7 @@
           <a:p>
             <a:fld id="{2DDBA0FF-ACFD-42C9-A4A3-E9ECDB2288AD}" type="datetimeFigureOut">
               <a:rPr lang="en-US" smtClean="0"/>
-              <a:t>9/16/2020</a:t>
+              <a:t>9/24/2020</a:t>
             </a:fld>
             <a:endParaRPr lang="en-US"/>
           </a:p>
@@ -1769,7 +1764,7 @@
           <a:p>
             <a:fld id="{547F1A0F-EF39-42ED-8DDC-A98A7EE806D8}" type="slidenum">
               <a:rPr lang="en-US" smtClean="0"/>
-              <a:t>‹#›</a:t>
+              <a:t>‹Nº›</a:t>
             </a:fld>
             <a:endParaRPr lang="en-US"/>
           </a:p>
@@ -1822,7 +1817,7 @@
           <a:p>
             <a:fld id="{2DDBA0FF-ACFD-42C9-A4A3-E9ECDB2288AD}" type="datetimeFigureOut">
               <a:rPr lang="en-US" smtClean="0"/>
-              <a:t>9/16/2020</a:t>
+              <a:t>9/24/2020</a:t>
             </a:fld>
             <a:endParaRPr lang="en-US"/>
           </a:p>
@@ -1864,7 +1859,7 @@
           <a:p>
             <a:fld id="{547F1A0F-EF39-42ED-8DDC-A98A7EE806D8}" type="slidenum">
               <a:rPr lang="en-US" smtClean="0"/>
-              <a:t>‹#›</a:t>
+              <a:t>‹Nº›</a:t>
             </a:fld>
             <a:endParaRPr lang="en-US"/>
           </a:p>
@@ -1925,10 +1920,9 @@
           </a:lstStyle>
           <a:p>
             <a:r>
-              <a:rPr lang="en-US" smtClean="0"/>
+              <a:rPr lang="en-US"/>
               <a:t>Click to edit Master title style</a:t>
             </a:r>
-            <a:endParaRPr lang="en-US"/>
           </a:p>
         </p:txBody>
       </p:sp>
@@ -1982,38 +1976,37 @@
           <a:p>
             <a:pPr lvl="0"/>
             <a:r>
-              <a:rPr lang="en-US" smtClean="0"/>
+              <a:rPr lang="en-US"/>
               <a:t>Edit Master text styles</a:t>
             </a:r>
           </a:p>
           <a:p>
             <a:pPr lvl="1"/>
             <a:r>
-              <a:rPr lang="en-US" smtClean="0"/>
+              <a:rPr lang="en-US"/>
               <a:t>Second level</a:t>
             </a:r>
           </a:p>
           <a:p>
             <a:pPr lvl="2"/>
             <a:r>
-              <a:rPr lang="en-US" smtClean="0"/>
+              <a:rPr lang="en-US"/>
               <a:t>Third level</a:t>
             </a:r>
           </a:p>
           <a:p>
             <a:pPr lvl="3"/>
             <a:r>
-              <a:rPr lang="en-US" smtClean="0"/>
+              <a:rPr lang="en-US"/>
               <a:t>Fourth level</a:t>
             </a:r>
           </a:p>
           <a:p>
             <a:pPr lvl="4"/>
             <a:r>
-              <a:rPr lang="en-US" smtClean="0"/>
+              <a:rPr lang="en-US"/>
               <a:t>Fifth level</a:t>
             </a:r>
-            <a:endParaRPr lang="en-US"/>
           </a:p>
         </p:txBody>
       </p:sp>
@@ -2076,7 +2069,7 @@
           <a:p>
             <a:pPr lvl="0"/>
             <a:r>
-              <a:rPr lang="en-US" smtClean="0"/>
+              <a:rPr lang="en-US"/>
               <a:t>Edit Master text styles</a:t>
             </a:r>
           </a:p>
@@ -2099,7 +2092,7 @@
           <a:p>
             <a:fld id="{2DDBA0FF-ACFD-42C9-A4A3-E9ECDB2288AD}" type="datetimeFigureOut">
               <a:rPr lang="en-US" smtClean="0"/>
-              <a:t>9/16/2020</a:t>
+              <a:t>9/24/2020</a:t>
             </a:fld>
             <a:endParaRPr lang="en-US"/>
           </a:p>
@@ -2141,7 +2134,7 @@
           <a:p>
             <a:fld id="{547F1A0F-EF39-42ED-8DDC-A98A7EE806D8}" type="slidenum">
               <a:rPr lang="en-US" smtClean="0"/>
-              <a:t>‹#›</a:t>
+              <a:t>‹Nº›</a:t>
             </a:fld>
             <a:endParaRPr lang="en-US"/>
           </a:p>
@@ -2202,10 +2195,9 @@
           </a:lstStyle>
           <a:p>
             <a:r>
-              <a:rPr lang="en-US" smtClean="0"/>
+              <a:rPr lang="en-US"/>
               <a:t>Click to edit Master title style</a:t>
             </a:r>
-            <a:endParaRPr lang="en-US"/>
           </a:p>
         </p:txBody>
       </p:sp>
@@ -2329,7 +2321,7 @@
           <a:p>
             <a:pPr lvl="0"/>
             <a:r>
-              <a:rPr lang="en-US" smtClean="0"/>
+              <a:rPr lang="en-US"/>
               <a:t>Edit Master text styles</a:t>
             </a:r>
           </a:p>
@@ -2352,7 +2344,7 @@
           <a:p>
             <a:fld id="{2DDBA0FF-ACFD-42C9-A4A3-E9ECDB2288AD}" type="datetimeFigureOut">
               <a:rPr lang="en-US" smtClean="0"/>
-              <a:t>9/16/2020</a:t>
+              <a:t>9/24/2020</a:t>
             </a:fld>
             <a:endParaRPr lang="en-US"/>
           </a:p>
@@ -2394,7 +2386,7 @@
           <a:p>
             <a:fld id="{547F1A0F-EF39-42ED-8DDC-A98A7EE806D8}" type="slidenum">
               <a:rPr lang="en-US" smtClean="0"/>
-              <a:t>‹#›</a:t>
+              <a:t>‹Nº›</a:t>
             </a:fld>
             <a:endParaRPr lang="en-US"/>
           </a:p>
@@ -2461,10 +2453,9 @@
           <a:lstStyle/>
           <a:p>
             <a:r>
-              <a:rPr lang="en-US" smtClean="0"/>
+              <a:rPr lang="en-US"/>
               <a:t>Click to edit Master title style</a:t>
             </a:r>
-            <a:endParaRPr lang="en-US"/>
           </a:p>
         </p:txBody>
       </p:sp>
@@ -2495,38 +2486,37 @@
           <a:p>
             <a:pPr lvl="0"/>
             <a:r>
-              <a:rPr lang="en-US" smtClean="0"/>
+              <a:rPr lang="en-US"/>
               <a:t>Edit Master text styles</a:t>
             </a:r>
           </a:p>
           <a:p>
             <a:pPr lvl="1"/>
             <a:r>
-              <a:rPr lang="en-US" smtClean="0"/>
+              <a:rPr lang="en-US"/>
               <a:t>Second level</a:t>
             </a:r>
           </a:p>
           <a:p>
             <a:pPr lvl="2"/>
             <a:r>
-              <a:rPr lang="en-US" smtClean="0"/>
+              <a:rPr lang="en-US"/>
               <a:t>Third level</a:t>
             </a:r>
           </a:p>
           <a:p>
             <a:pPr lvl="3"/>
             <a:r>
-              <a:rPr lang="en-US" smtClean="0"/>
+              <a:rPr lang="en-US"/>
               <a:t>Fourth level</a:t>
             </a:r>
           </a:p>
           <a:p>
             <a:pPr lvl="4"/>
             <a:r>
-              <a:rPr lang="en-US" smtClean="0"/>
+              <a:rPr lang="en-US"/>
               <a:t>Fifth level</a:t>
             </a:r>
-            <a:endParaRPr lang="en-US"/>
           </a:p>
         </p:txBody>
       </p:sp>
@@ -2565,7 +2555,7 @@
           <a:p>
             <a:fld id="{2DDBA0FF-ACFD-42C9-A4A3-E9ECDB2288AD}" type="datetimeFigureOut">
               <a:rPr lang="en-US" smtClean="0"/>
-              <a:t>9/16/2020</a:t>
+              <a:t>9/24/2020</a:t>
             </a:fld>
             <a:endParaRPr lang="en-US"/>
           </a:p>
@@ -2643,7 +2633,7 @@
           <a:p>
             <a:fld id="{547F1A0F-EF39-42ED-8DDC-A98A7EE806D8}" type="slidenum">
               <a:rPr lang="en-US" smtClean="0"/>
-              <a:t>‹#›</a:t>
+              <a:t>‹Nº›</a:t>
             </a:fld>
             <a:endParaRPr lang="en-US"/>
           </a:p>
@@ -2988,20 +2978,17 @@
           <a:lstStyle/>
           <a:p>
             <a:r>
-              <a:rPr lang="es-MX" b="1" dirty="0" smtClean="0">
+              <a:rPr lang="es-MX" b="1" dirty="0">
                 <a:latin typeface="Century Gothic" panose="020B0502020202020204" pitchFamily="34" charset="0"/>
               </a:rPr>
               <a:t>[ER]</a:t>
             </a:r>
             <a:r>
-              <a:rPr lang="es-MX" dirty="0" smtClean="0">
+              <a:rPr lang="es-MX" dirty="0">
                 <a:latin typeface="Century Gothic" panose="020B0502020202020204" pitchFamily="34" charset="0"/>
               </a:rPr>
               <a:t> Modelo de Datos</a:t>
             </a:r>
-            <a:endParaRPr lang="es-MX" dirty="0">
-              <a:latin typeface="Century Gothic" panose="020B0502020202020204" pitchFamily="34" charset="0"/>
-            </a:endParaRPr>
           </a:p>
         </p:txBody>
       </p:sp>
@@ -3038,7 +3025,7 @@
           </a:p>
           <a:p>
             <a:r>
-              <a:rPr lang="en-US" sz="1800" dirty="0" smtClean="0">
+              <a:rPr lang="en-US" sz="1800" dirty="0">
                 <a:latin typeface="Century Gothic" panose="020B0502020202020204" pitchFamily="34" charset="0"/>
               </a:rPr>
               <a:t>FLUJO DE APRTOVACIONES</a:t>
@@ -3059,13 +3046,6 @@
   <p:clrMapOvr>
     <a:masterClrMapping/>
   </p:clrMapOvr>
-  <p:timing>
-    <p:tnLst>
-      <p:par>
-        <p:cTn id="1" dur="indefinite" restart="never" nodeType="tmRoot"/>
-      </p:par>
-    </p:tnLst>
-  </p:timing>
 </p:sld>
 </file>
 
@@ -3109,15 +3089,6 @@
           <a:lstStyle/>
           <a:p>
             <a:pPr algn="ctr"/>
-            <a:r>
-              <a:rPr lang="es-MX" sz="2000" dirty="0">
-                <a:solidFill>
-                  <a:srgbClr val="92D050"/>
-                </a:solidFill>
-                <a:latin typeface="Century Gothic" panose="020B0502020202020204" pitchFamily="34" charset="0"/>
-              </a:rPr>
-              <a:t/>
-            </a:r>
             <a:br>
               <a:rPr lang="es-MX" sz="2000" dirty="0">
                 <a:solidFill>
@@ -3127,7 +3098,7 @@
               </a:rPr>
             </a:br>
             <a:r>
-              <a:rPr lang="es-MX" dirty="0" smtClean="0">
+              <a:rPr lang="es-MX" dirty="0">
                 <a:solidFill>
                   <a:srgbClr val="92D050"/>
                 </a:solidFill>
@@ -3186,7 +3157,7 @@
           <a:p>
             <a:pPr algn="ctr"/>
             <a:r>
-              <a:rPr lang="es-MX" sz="1050" b="1" dirty="0" smtClean="0">
+              <a:rPr lang="es-MX" sz="1050" b="1" dirty="0">
                 <a:solidFill>
                   <a:srgbClr val="C00000"/>
                 </a:solidFill>
@@ -3245,8 +3216,8 @@
         </p:nvSpPr>
         <p:spPr>
           <a:xfrm>
-            <a:off x="1733989" y="1658761"/>
-            <a:ext cx="1614424" cy="1731930"/>
+            <a:off x="430172" y="738888"/>
+            <a:ext cx="2229265" cy="3891677"/>
           </a:xfrm>
           <a:prstGeom prst="rect">
             <a:avLst/>
@@ -3280,7 +3251,7 @@
           <a:p>
             <a:pPr algn="ctr"/>
             <a:r>
-              <a:rPr lang="es-MX" sz="1050" b="1" dirty="0" smtClean="0">
+              <a:rPr lang="es-MX" sz="1050" b="1" dirty="0">
                 <a:solidFill>
                   <a:prstClr val="black"/>
                 </a:solidFill>
@@ -3290,102 +3261,172 @@
           </a:p>
           <a:p>
             <a:r>
-              <a:rPr lang="es-MX" sz="1050" b="1" dirty="0" smtClean="0">
+              <a:rPr lang="es-MX" sz="1050" b="1" dirty="0">
                 <a:solidFill>
                   <a:prstClr val="black"/>
                 </a:solidFill>
               </a:rPr>
-              <a:t>(PK) K_INVENTARIO</a:t>
-            </a:r>
+              <a:t>(PK) K_INVENTARIO	(IDENTITY)</a:t>
+            </a:r>
+          </a:p>
+          <a:p>
+            <a:r>
+              <a:rPr lang="es-MX" sz="1050" b="1" dirty="0">
+                <a:solidFill>
+                  <a:prstClr val="black"/>
+                </a:solidFill>
+              </a:rPr>
+              <a:t>(FK) K_ITEM</a:t>
+            </a:r>
+          </a:p>
+          <a:p>
+            <a:r>
+              <a:rPr lang="es-MX" sz="1050" b="1" dirty="0">
+                <a:solidFill>
+                  <a:prstClr val="black"/>
+                </a:solidFill>
+              </a:rPr>
+              <a:t>(FK) K_FOLIO</a:t>
+            </a:r>
+          </a:p>
+          <a:p>
+            <a:r>
+              <a:rPr lang="es-MX" sz="1050" b="1" dirty="0">
+                <a:solidFill>
+                  <a:prstClr val="black"/>
+                </a:solidFill>
+              </a:rPr>
+              <a:t>(FK) K_CLASIFICACION (DATA_02)</a:t>
+            </a:r>
+          </a:p>
+          <a:p>
+            <a:r>
+              <a:rPr lang="es-MX" sz="1050" b="1" dirty="0">
+                <a:solidFill>
+                  <a:srgbClr val="00B050"/>
+                </a:solidFill>
+              </a:rPr>
+              <a:t>	 DEFAULT EN 0</a:t>
+            </a:r>
+          </a:p>
+          <a:p>
+            <a:r>
+              <a:rPr lang="es-MX" sz="1050" b="1" dirty="0">
+                <a:solidFill>
+                  <a:prstClr val="black"/>
+                </a:solidFill>
+              </a:rPr>
+              <a:t>(FK) K_STATUS (CREAR DATA_02)</a:t>
+            </a:r>
+          </a:p>
+          <a:p>
             <a:endParaRPr lang="es-MX" sz="1050" b="1" dirty="0">
               <a:solidFill>
-                <a:prstClr val="black"/>
+                <a:srgbClr val="00B050"/>
               </a:solidFill>
             </a:endParaRPr>
           </a:p>
           <a:p>
             <a:r>
-              <a:rPr lang="es-MX" sz="1050" b="1" dirty="0" smtClean="0">
-                <a:solidFill>
-                  <a:prstClr val="black"/>
-                </a:solidFill>
-              </a:rPr>
-              <a:t>(FK) K_MATERIAL</a:t>
-            </a:r>
-          </a:p>
-          <a:p>
-            <a:r>
-              <a:rPr lang="es-MX" sz="1050" b="1" dirty="0" smtClean="0">
-                <a:solidFill>
-                  <a:prstClr val="black"/>
-                </a:solidFill>
-              </a:rPr>
-              <a:t>(FK) K_FOLIO</a:t>
-            </a:r>
-          </a:p>
-          <a:p>
-            <a:r>
-              <a:rPr lang="es-MX" sz="1050" b="1" dirty="0" smtClean="0">
-                <a:solidFill>
-                  <a:prstClr val="black"/>
-                </a:solidFill>
-              </a:rPr>
-              <a:t>(FK) K_UNIDAD_MEDIDA</a:t>
-            </a:r>
-          </a:p>
-          <a:p>
-            <a:r>
-              <a:rPr lang="es-MX" sz="1050" b="1" dirty="0" smtClean="0">
-                <a:solidFill>
-                  <a:prstClr val="black"/>
-                </a:solidFill>
-              </a:rPr>
-              <a:t>(FK) K_CLASIFICACION</a:t>
-            </a:r>
-          </a:p>
-          <a:p>
-            <a:r>
-              <a:rPr lang="es-MX" sz="1050" b="1" dirty="0" smtClean="0">
+              <a:rPr lang="es-MX" sz="1050" b="1" dirty="0">
                 <a:solidFill>
                   <a:srgbClr val="00B050"/>
                 </a:solidFill>
               </a:rPr>
-              <a:t>LOTE</a:t>
-            </a:r>
-          </a:p>
-          <a:p>
-            <a:r>
-              <a:rPr lang="es-MX" sz="1050" b="1" dirty="0" smtClean="0">
+              <a:t>K_ORDEN_COMPRA_PEDIDO (PEDIDO)</a:t>
+            </a:r>
+          </a:p>
+          <a:p>
+            <a:r>
+              <a:rPr lang="es-MX" sz="1050" b="1" dirty="0">
                 <a:solidFill>
                   <a:srgbClr val="00B050"/>
                 </a:solidFill>
               </a:rPr>
-              <a:t>CONSECUTIVO</a:t>
-            </a:r>
-          </a:p>
-          <a:p>
-            <a:r>
-              <a:rPr lang="es-MX" sz="1050" b="1" dirty="0" smtClean="0">
+              <a:t>K_ENTREGA (RECIBO)</a:t>
+            </a:r>
+          </a:p>
+          <a:p>
+            <a:endParaRPr lang="es-MX" sz="1050" b="1" dirty="0">
+              <a:solidFill>
+                <a:srgbClr val="00B050"/>
+              </a:solidFill>
+            </a:endParaRPr>
+          </a:p>
+          <a:p>
+            <a:r>
+              <a:rPr lang="es-MX" sz="1050" b="1" dirty="0">
                 <a:solidFill>
                   <a:srgbClr val="00B050"/>
                 </a:solidFill>
               </a:rPr>
-              <a:t>CANTIDAD</a:t>
-            </a:r>
-          </a:p>
-          <a:p>
-            <a:r>
-              <a:rPr lang="es-MX" sz="1050" b="1" dirty="0" smtClean="0">
+              <a:t>LOTE PROVEEDOR</a:t>
+            </a:r>
+          </a:p>
+          <a:p>
+            <a:r>
+              <a:rPr lang="es-MX" sz="1050" b="1" dirty="0">
                 <a:solidFill>
                   <a:srgbClr val="00B050"/>
                 </a:solidFill>
               </a:rPr>
+              <a:t>LOTE PEARL</a:t>
+            </a:r>
+          </a:p>
+          <a:p>
+            <a:r>
+              <a:rPr lang="es-MX" sz="1050" b="1" dirty="0">
+                <a:solidFill>
+                  <a:srgbClr val="00B050"/>
+                </a:solidFill>
+              </a:rPr>
+              <a:t>CONSECUTIVO (SE ASIGNA POR LOTES)</a:t>
+            </a:r>
+          </a:p>
+          <a:p>
+            <a:endParaRPr lang="es-MX" sz="1050" b="1" dirty="0">
+              <a:solidFill>
+                <a:srgbClr val="00B050"/>
+              </a:solidFill>
+            </a:endParaRPr>
+          </a:p>
+          <a:p>
+            <a:r>
+              <a:rPr lang="es-MX" sz="1050" b="1" dirty="0">
+                <a:solidFill>
+                  <a:srgbClr val="00B050"/>
+                </a:solidFill>
+              </a:rPr>
+              <a:t>CANTIDAD RECIBIDA</a:t>
+            </a:r>
+          </a:p>
+          <a:p>
+            <a:endParaRPr lang="es-MX" sz="1050" b="1" dirty="0">
+              <a:solidFill>
+                <a:srgbClr val="00B050"/>
+              </a:solidFill>
+            </a:endParaRPr>
+          </a:p>
+          <a:p>
+            <a:endParaRPr lang="es-MX" sz="1050" b="1" dirty="0">
+              <a:solidFill>
+                <a:srgbClr val="00B050"/>
+              </a:solidFill>
+            </a:endParaRPr>
+          </a:p>
+          <a:p>
+            <a:r>
+              <a:rPr lang="es-MX" sz="1050" b="1" dirty="0">
+                <a:solidFill>
+                  <a:srgbClr val="00B050"/>
+                </a:solidFill>
+              </a:rPr>
               <a:t>K_USUARIO</a:t>
             </a:r>
           </a:p>
           <a:p>
             <a:r>
-              <a:rPr lang="es-MX" sz="1050" b="1" dirty="0" smtClean="0">
+              <a:rPr lang="es-MX" sz="1050" b="1" dirty="0">
                 <a:solidFill>
                   <a:srgbClr val="00B050"/>
                 </a:solidFill>
@@ -3438,7 +3479,7 @@
           <a:p>
             <a:pPr algn="ctr"/>
             <a:r>
-              <a:rPr lang="es-MX" sz="1050" b="1" dirty="0" smtClean="0">
+              <a:rPr lang="es-MX" sz="1050" b="1" dirty="0">
                 <a:solidFill>
                   <a:srgbClr val="C00000"/>
                 </a:solidFill>
@@ -3499,7 +3540,7 @@
           <a:p>
             <a:pPr algn="ctr"/>
             <a:r>
-              <a:rPr lang="es-MX" sz="1050" b="1" dirty="0" smtClean="0">
+              <a:rPr lang="es-MX" sz="1050" b="1" dirty="0">
                 <a:solidFill>
                   <a:srgbClr val="C00000"/>
                 </a:solidFill>
@@ -3560,7 +3601,7 @@
           <a:p>
             <a:pPr algn="ctr"/>
             <a:r>
-              <a:rPr lang="es-MX" sz="1050" b="1" dirty="0" smtClean="0">
+              <a:rPr lang="es-MX" sz="1050" b="1" dirty="0">
                 <a:solidFill>
                   <a:prstClr val="black"/>
                 </a:solidFill>
@@ -3570,22 +3611,17 @@
           </a:p>
           <a:p>
             <a:r>
-              <a:rPr lang="es-MX" sz="1050" b="1" dirty="0" smtClean="0">
+              <a:rPr lang="es-MX" sz="1050" b="1" dirty="0">
                 <a:solidFill>
                   <a:prstClr val="black"/>
                 </a:solidFill>
               </a:rPr>
               <a:t>(PK) K_INVENTARIO_LOCACION</a:t>
             </a:r>
-            <a:endParaRPr lang="es-MX" sz="1050" b="1" dirty="0">
-              <a:solidFill>
-                <a:prstClr val="black"/>
-              </a:solidFill>
-            </a:endParaRPr>
-          </a:p>
-          <a:p>
-            <a:r>
-              <a:rPr lang="es-MX" sz="1050" b="1" dirty="0" smtClean="0">
+          </a:p>
+          <a:p>
+            <a:r>
+              <a:rPr lang="es-MX" sz="1050" b="1" dirty="0">
                 <a:solidFill>
                   <a:prstClr val="black"/>
                 </a:solidFill>
@@ -3595,7 +3631,7 @@
           </a:p>
           <a:p>
             <a:r>
-              <a:rPr lang="es-MX" sz="1050" b="1" dirty="0" smtClean="0">
+              <a:rPr lang="es-MX" sz="1050" b="1" dirty="0">
                 <a:solidFill>
                   <a:prstClr val="black"/>
                 </a:solidFill>
@@ -3605,7 +3641,7 @@
           </a:p>
           <a:p>
             <a:r>
-              <a:rPr lang="es-MX" sz="1050" b="1" dirty="0" smtClean="0">
+              <a:rPr lang="es-MX" sz="1050" b="1" dirty="0">
                 <a:solidFill>
                   <a:srgbClr val="00B050"/>
                 </a:solidFill>
@@ -3615,7 +3651,7 @@
           </a:p>
           <a:p>
             <a:r>
-              <a:rPr lang="es-MX" sz="1050" b="1" dirty="0" smtClean="0">
+              <a:rPr lang="es-MX" sz="1050" b="1" dirty="0">
                 <a:solidFill>
                   <a:srgbClr val="00B050"/>
                 </a:solidFill>
@@ -3625,7 +3661,7 @@
           </a:p>
           <a:p>
             <a:r>
-              <a:rPr lang="es-MX" sz="1050" b="1" dirty="0" smtClean="0">
+              <a:rPr lang="es-MX" sz="1050" b="1" dirty="0">
                 <a:solidFill>
                   <a:srgbClr val="00B050"/>
                 </a:solidFill>
@@ -3635,7 +3671,7 @@
           </a:p>
           <a:p>
             <a:r>
-              <a:rPr lang="es-MX" sz="1050" b="1" dirty="0" smtClean="0">
+              <a:rPr lang="es-MX" sz="1050" b="1" dirty="0">
                 <a:solidFill>
                   <a:srgbClr val="00B050"/>
                 </a:solidFill>
@@ -3645,7 +3681,7 @@
           </a:p>
           <a:p>
             <a:r>
-              <a:rPr lang="es-MX" sz="1050" b="1" dirty="0" smtClean="0">
+              <a:rPr lang="es-MX" sz="1050" b="1" dirty="0">
                 <a:solidFill>
                   <a:srgbClr val="00B050"/>
                 </a:solidFill>
@@ -3655,7 +3691,7 @@
           </a:p>
           <a:p>
             <a:r>
-              <a:rPr lang="es-MX" sz="1050" b="1" dirty="0" smtClean="0">
+              <a:rPr lang="es-MX" sz="1050" b="1" dirty="0">
                 <a:solidFill>
                   <a:srgbClr val="00B050"/>
                 </a:solidFill>
@@ -3708,7 +3744,7 @@
           <a:p>
             <a:pPr algn="ctr"/>
             <a:r>
-              <a:rPr lang="es-MX" sz="1050" b="1" dirty="0" smtClean="0">
+              <a:rPr lang="es-MX" sz="1050" b="1" dirty="0">
                 <a:solidFill>
                   <a:prstClr val="black"/>
                 </a:solidFill>
@@ -3718,13 +3754,15 @@
           </a:p>
           <a:p>
             <a:r>
-              <a:rPr lang="es-MX" sz="1050" b="1" dirty="0" smtClean="0">
+              <a:rPr lang="es-MX" sz="1050" b="1" dirty="0">
                 <a:solidFill>
                   <a:prstClr val="black"/>
                 </a:solidFill>
               </a:rPr>
-              <a:t>(PK) K_FOLIO</a:t>
-            </a:r>
+              <a:t>(PK) K_FOLIO (IDENTITY)</a:t>
+            </a:r>
+          </a:p>
+          <a:p>
             <a:endParaRPr lang="es-MX" sz="1050" b="1" dirty="0">
               <a:solidFill>
                 <a:prstClr val="black"/>
@@ -3733,7 +3771,7 @@
           </a:p>
           <a:p>
             <a:r>
-              <a:rPr lang="es-MX" sz="1050" b="1" dirty="0" smtClean="0">
+              <a:rPr lang="es-MX" sz="1050" b="1" dirty="0">
                 <a:solidFill>
                   <a:prstClr val="black"/>
                 </a:solidFill>
@@ -3742,43 +3780,45 @@
             </a:r>
           </a:p>
           <a:p>
-            <a:r>
-              <a:rPr lang="es-MX" sz="1050" b="1" dirty="0" smtClean="0">
-                <a:solidFill>
-                  <a:prstClr val="black"/>
-                </a:solidFill>
-              </a:rPr>
-              <a:t>(FK) K_ORDEN_TRABAJO</a:t>
-            </a:r>
-          </a:p>
-          <a:p>
-            <a:r>
-              <a:rPr lang="es-MX" sz="1050" b="1" smtClean="0">
-                <a:solidFill>
-                  <a:srgbClr val="00B050"/>
-                </a:solidFill>
-              </a:rPr>
-              <a:t>K_ESTATUS</a:t>
-            </a:r>
-            <a:endParaRPr lang="es-MX" sz="1050" b="1" dirty="0" smtClean="0">
+            <a:endParaRPr lang="es-MX" sz="1050" b="1" dirty="0">
               <a:solidFill>
-                <a:srgbClr val="00B050"/>
+                <a:prstClr val="black"/>
               </a:solidFill>
             </a:endParaRPr>
           </a:p>
           <a:p>
             <a:r>
-              <a:rPr lang="es-MX" sz="1050" b="1" dirty="0" smtClean="0">
+              <a:rPr lang="es-MX" sz="1050" b="1" dirty="0">
+                <a:solidFill>
+                  <a:prstClr val="black"/>
+                </a:solidFill>
+              </a:rPr>
+              <a:t>(FK) K_ORDEN_TRABAJO</a:t>
+            </a:r>
+          </a:p>
+          <a:p>
+            <a:r>
+              <a:rPr lang="es-MX" sz="1050" b="1" dirty="0">
                 <a:solidFill>
                   <a:srgbClr val="00B050"/>
                 </a:solidFill>
               </a:rPr>
+              <a:t>TIPO (B)</a:t>
+            </a:r>
+          </a:p>
+          <a:p>
+            <a:r>
+              <a:rPr lang="es-MX" sz="1050" b="1" dirty="0">
+                <a:solidFill>
+                  <a:srgbClr val="00B050"/>
+                </a:solidFill>
+              </a:rPr>
               <a:t>F_FOLIO</a:t>
             </a:r>
           </a:p>
           <a:p>
             <a:r>
-              <a:rPr lang="es-MX" sz="1050" b="1" dirty="0" smtClean="0">
+              <a:rPr lang="es-MX" sz="1050" b="1" dirty="0">
                 <a:solidFill>
                   <a:srgbClr val="00B050"/>
                 </a:solidFill>
@@ -3871,7 +3911,7 @@
           <a:p>
             <a:pPr algn="ctr"/>
             <a:r>
-              <a:rPr lang="es-MX" sz="1050" b="1" dirty="0" smtClean="0">
+              <a:rPr lang="es-MX" sz="1050" b="1" dirty="0">
                 <a:solidFill>
                   <a:srgbClr val="C00000"/>
                 </a:solidFill>
@@ -3978,7 +4018,7 @@
         <p:spPr>
           <a:xfrm>
             <a:off x="7930448" y="3383236"/>
-            <a:ext cx="2081914" cy="1731930"/>
+            <a:ext cx="2081914" cy="2303886"/>
           </a:xfrm>
           <a:prstGeom prst="rect">
             <a:avLst/>
@@ -4012,7 +4052,7 @@
           <a:p>
             <a:pPr algn="ctr"/>
             <a:r>
-              <a:rPr lang="es-MX" sz="1050" b="1" dirty="0" smtClean="0">
+              <a:rPr lang="es-MX" sz="1050" b="1" dirty="0">
                 <a:solidFill>
                   <a:prstClr val="black"/>
                 </a:solidFill>
@@ -4022,13 +4062,35 @@
           </a:p>
           <a:p>
             <a:r>
-              <a:rPr lang="es-MX" sz="1050" b="1" dirty="0" smtClean="0">
+              <a:rPr lang="es-MX" sz="1050" b="1" dirty="0">
                 <a:solidFill>
                   <a:prstClr val="black"/>
                 </a:solidFill>
               </a:rPr>
               <a:t>(PK) K_TRANSACCION</a:t>
             </a:r>
+          </a:p>
+          <a:p>
+            <a:r>
+              <a:rPr lang="es-MX" sz="1050" b="1" dirty="0">
+                <a:solidFill>
+                  <a:prstClr val="black"/>
+                </a:solidFill>
+              </a:rPr>
+              <a:t>--(FK) K_FOLIO (QUITAR)</a:t>
+            </a:r>
+          </a:p>
+          <a:p>
+            <a:r>
+              <a:rPr lang="es-MX" sz="1050" b="1" dirty="0">
+                <a:solidFill>
+                  <a:prstClr val="black"/>
+                </a:solidFill>
+              </a:rPr>
+              <a:t>(FK) K_LOCACION (MHI, MESA)</a:t>
+            </a:r>
+          </a:p>
+          <a:p>
             <a:endParaRPr lang="es-MX" sz="1050" b="1" dirty="0">
               <a:solidFill>
                 <a:prstClr val="black"/>
@@ -4036,63 +4098,170 @@
             </a:endParaRPr>
           </a:p>
           <a:p>
-            <a:r>
-              <a:rPr lang="es-MX" sz="1050" b="1" dirty="0" smtClean="0">
+            <a:endParaRPr lang="es-MX" sz="1050" b="1" dirty="0">
+              <a:solidFill>
+                <a:prstClr val="black"/>
+              </a:solidFill>
+            </a:endParaRPr>
+          </a:p>
+          <a:p>
+            <a:r>
+              <a:rPr lang="es-MX" sz="1050" b="1" dirty="0">
+                <a:solidFill>
+                  <a:srgbClr val="00B050"/>
+                </a:solidFill>
+              </a:rPr>
+              <a:t>TIPO_TRANSACCION</a:t>
+            </a:r>
+          </a:p>
+          <a:p>
+            <a:endParaRPr lang="es-MX" sz="1050" b="1" dirty="0">
+              <a:solidFill>
+                <a:prstClr val="black"/>
+              </a:solidFill>
+            </a:endParaRPr>
+          </a:p>
+          <a:p>
+            <a:r>
+              <a:rPr lang="es-MX" sz="1050" b="1" dirty="0">
+                <a:solidFill>
+                  <a:srgbClr val="00B050"/>
+                </a:solidFill>
+              </a:rPr>
+              <a:t>LOTE</a:t>
+            </a:r>
+          </a:p>
+          <a:p>
+            <a:r>
+              <a:rPr lang="es-MX" sz="1050" b="1" dirty="0">
+                <a:solidFill>
+                  <a:srgbClr val="00B050"/>
+                </a:solidFill>
+              </a:rPr>
+              <a:t>CANTIDAD</a:t>
+            </a:r>
+          </a:p>
+          <a:p>
+            <a:r>
+              <a:rPr lang="es-MX" sz="1050" b="1" dirty="0">
+                <a:solidFill>
+                  <a:srgbClr val="00B050"/>
+                </a:solidFill>
+              </a:rPr>
+              <a:t>CANTIDAD_DISPONIBLE</a:t>
+            </a:r>
+          </a:p>
+          <a:p>
+            <a:r>
+              <a:rPr lang="es-MX" sz="1050" b="1" dirty="0">
+                <a:solidFill>
+                  <a:srgbClr val="00B050"/>
+                </a:solidFill>
+              </a:rPr>
+              <a:t>F_TRANSACCION</a:t>
+            </a:r>
+          </a:p>
+          <a:p>
+            <a:r>
+              <a:rPr lang="es-MX" sz="1050" b="1" dirty="0">
+                <a:solidFill>
+                  <a:srgbClr val="00B050"/>
+                </a:solidFill>
+              </a:rPr>
+              <a:t>K_USUARIO</a:t>
+            </a:r>
+          </a:p>
+        </p:txBody>
+      </p:sp>
+      <p:sp>
+        <p:nvSpPr>
+          <p:cNvPr id="18" name="Rectangle 132">
+            <a:extLst>
+              <a:ext uri="{FF2B5EF4-FFF2-40B4-BE49-F238E27FC236}">
+                <a16:creationId xmlns:a16="http://schemas.microsoft.com/office/drawing/2014/main" id="{D903617F-D06A-4231-BCD4-9C0743DE9719}"/>
+              </a:ext>
+            </a:extLst>
+          </p:cNvPr>
+          <p:cNvSpPr/>
+          <p:nvPr/>
+        </p:nvSpPr>
+        <p:spPr>
+          <a:xfrm>
+            <a:off x="5463575" y="4188988"/>
+            <a:ext cx="2081914" cy="2303886"/>
+          </a:xfrm>
+          <a:prstGeom prst="rect">
+            <a:avLst/>
+          </a:prstGeom>
+          <a:solidFill>
+            <a:schemeClr val="bg1"/>
+          </a:solidFill>
+          <a:ln w="6350">
+            <a:prstDash val="dash"/>
+          </a:ln>
+        </p:spPr>
+        <p:style>
+          <a:lnRef idx="2">
+            <a:schemeClr val="accent1">
+              <a:shade val="50000"/>
+            </a:schemeClr>
+          </a:lnRef>
+          <a:fillRef idx="1">
+            <a:schemeClr val="accent1"/>
+          </a:fillRef>
+          <a:effectRef idx="0">
+            <a:schemeClr val="accent1"/>
+          </a:effectRef>
+          <a:fontRef idx="minor">
+            <a:schemeClr val="lt1"/>
+          </a:fontRef>
+        </p:style>
+        <p:txBody>
+          <a:bodyPr rtlCol="0" anchor="ctr"/>
+          <a:lstStyle/>
+          <a:p>
+            <a:pPr algn="ctr"/>
+            <a:r>
+              <a:rPr lang="es-MX" sz="1050" b="1" dirty="0">
                 <a:solidFill>
                   <a:prstClr val="black"/>
                 </a:solidFill>
               </a:rPr>
-              <a:t>(FK) K_FOLIO</a:t>
-            </a:r>
-          </a:p>
-          <a:p>
-            <a:r>
-              <a:rPr lang="es-MX" sz="1050" b="1" dirty="0" smtClean="0">
-                <a:solidFill>
-                  <a:srgbClr val="00B050"/>
-                </a:solidFill>
-              </a:rPr>
-              <a:t>LOTE</a:t>
-            </a:r>
-          </a:p>
-          <a:p>
-            <a:r>
-              <a:rPr lang="es-MX" sz="1050" b="1" dirty="0" smtClean="0">
-                <a:solidFill>
-                  <a:srgbClr val="00B050"/>
-                </a:solidFill>
-              </a:rPr>
-              <a:t>CANTIDAD</a:t>
-            </a:r>
-          </a:p>
-          <a:p>
-            <a:r>
-              <a:rPr lang="es-MX" sz="1050" b="1" dirty="0" smtClean="0">
-                <a:solidFill>
-                  <a:srgbClr val="00B050"/>
-                </a:solidFill>
-              </a:rPr>
-              <a:t>CANTIDAD_DISPONIBLE</a:t>
-            </a:r>
-          </a:p>
-          <a:p>
-            <a:r>
-              <a:rPr lang="es-MX" sz="1050" b="1" dirty="0" smtClean="0">
-                <a:solidFill>
-                  <a:srgbClr val="00B050"/>
-                </a:solidFill>
-              </a:rPr>
-              <a:t>F_TRANSACCION</a:t>
-            </a:r>
-          </a:p>
-          <a:p>
-            <a:r>
-              <a:rPr lang="es-MX" sz="1050" b="1" dirty="0" smtClean="0">
-                <a:solidFill>
-                  <a:srgbClr val="00B050"/>
-                </a:solidFill>
-              </a:rPr>
-              <a:t>K_USUARIO</a:t>
+              <a:t>JUNTAR</a:t>
+            </a:r>
+          </a:p>
+          <a:p>
+            <a:pPr algn="ctr"/>
+            <a:r>
+              <a:rPr lang="es-MX" sz="1050" b="1" dirty="0">
+                <a:solidFill>
+                  <a:prstClr val="black"/>
+                </a:solidFill>
+              </a:rPr>
+              <a:t>-</a:t>
+            </a:r>
+            <a:r>
+              <a:rPr lang="es-MX" dirty="0"/>
+              <a:t>[[</a:t>
+            </a:r>
+            <a:r>
+              <a:rPr lang="es-MX" sz="1050" b="1" dirty="0">
+                <a:solidFill>
+                  <a:prstClr val="black"/>
+                </a:solidFill>
+              </a:rPr>
+              <a:t>IMLSTRX _SQL]</a:t>
+            </a:r>
+          </a:p>
+          <a:p>
+            <a:pPr algn="ctr"/>
+            <a:r>
+              <a:rPr lang="es-MX" sz="1050" b="1" dirty="0">
+                <a:solidFill>
+                  <a:prstClr val="black"/>
+                </a:solidFill>
+              </a:rPr>
+              <a:t>- [IMLSTRX_SQL]</a:t>
             </a:r>
           </a:p>
         </p:txBody>
@@ -4107,13 +4276,6 @@
   <p:clrMapOvr>
     <a:masterClrMapping/>
   </p:clrMapOvr>
-  <p:timing>
-    <p:tnLst>
-      <p:par>
-        <p:cTn id="1" dur="indefinite" restart="never" nodeType="tmRoot"/>
-      </p:par>
-    </p:tnLst>
-  </p:timing>
 </p:sld>
 </file>
 
@@ -4372,7 +4534,7 @@
   <a:extraClrSchemeLst/>
   <a:extLst>
     <a:ext uri="{05A4C25C-085E-4340-85A3-A5531E510DB2}">
-      <thm15:themeFamily xmlns:thm15="http://schemas.microsoft.com/office/thememl/2012/main" xmlns="" name="Office Theme" id="{62F939B6-93AF-4DB8-9C6B-D6C7DFDC589F}" vid="{4A3C46E8-61CC-4603-A589-7422A47A8E4A}"/>
+      <thm15:themeFamily xmlns:thm15="http://schemas.microsoft.com/office/thememl/2012/main" name="Office Theme" id="{62F939B6-93AF-4DB8-9C6B-D6C7DFDC589F}" vid="{4A3C46E8-61CC-4603-A589-7422A47A8E4A}"/>
     </a:ext>
   </a:extLst>
 </a:theme>
